--- a/lecons/LSA/Biogeography/27_LSA_BIO_L24_Nutrient_Cycling_in_Contrasting_Ecosystems.pptx
+++ b/lecons/LSA/Biogeography/27_LSA_BIO_L24_Nutrient_Cycling_in_Contrasting_Ecosystems.pptx
@@ -13421,7 +13421,7 @@
               <a:buNone/>
             </a:pPr>
             <a:r>
-              <a:rPr lang="en-US" sz="4000" b="1" dirty="0">
+              <a:rPr lang="en-US" sz="3200" b="1" dirty="0">
                 <a:solidFill>
                   <a:srgbClr val="111111"/>
                 </a:solidFill>
@@ -13431,7 +13431,7 @@
               </a:rPr>
               <a:t>Topic: Ecological Systems (Ecosystems)</a:t>
             </a:r>
-            <a:endParaRPr lang="en-US" sz="4000" dirty="0"/>
+            <a:endParaRPr lang="en-US" sz="3200" dirty="0"/>
           </a:p>
           <a:p>
             <a:pPr algn="l" indent="0" marL="0">
@@ -13441,7 +13441,7 @@
               <a:buNone/>
             </a:pPr>
             <a:r>
-              <a:rPr lang="en-US" sz="4000" b="1" dirty="0">
+              <a:rPr lang="en-US" sz="3200" b="1" dirty="0">
                 <a:solidFill>
                   <a:srgbClr val="111111"/>
                 </a:solidFill>
@@ -13451,7 +13451,7 @@
               </a:rPr>
               <a:t>Sub-topic: The Functioning of Ecosystems</a:t>
             </a:r>
-            <a:endParaRPr lang="en-US" sz="4000" dirty="0"/>
+            <a:endParaRPr lang="en-US" sz="3200" dirty="0"/>
           </a:p>
           <a:p>
             <a:pPr algn="l" indent="0" marL="0">
@@ -13461,7 +13461,7 @@
               <a:buNone/>
             </a:pPr>
             <a:r>
-              <a:rPr lang="en-US" sz="4000" b="1" dirty="0">
+              <a:rPr lang="en-US" sz="3200" b="1" dirty="0">
                 <a:solidFill>
                   <a:srgbClr val="990011"/>
                 </a:solidFill>
@@ -13471,7 +13471,7 @@
               </a:rPr>
               <a:t>Lesson 24: Nutrient Cycling in Contrasting Ecosystems</a:t>
             </a:r>
-            <a:endParaRPr lang="en-US" sz="4000" dirty="0"/>
+            <a:endParaRPr lang="en-US" sz="3200" dirty="0"/>
           </a:p>
         </p:txBody>
       </p:sp>
